--- a/tmp-tj/261029_Proline_concurrents-abidjan_v2.pptx
+++ b/tmp-tj/261029_Proline_concurrents-abidjan_v2.pptx
@@ -60,7 +60,7 @@
         <a:solidFill>
           <a:srgbClr val="000000"/>
         </a:solidFill>
-        <a:latin typeface="Arial"/>
+        <a:latin typeface="Montserrat"/>
         <a:ea typeface="Arial"/>
         <a:cs typeface="Arial"/>
         <a:sym typeface="Arial"/>
@@ -84,7 +84,7 @@
         <a:solidFill>
           <a:srgbClr val="000000"/>
         </a:solidFill>
-        <a:latin typeface="Arial"/>
+        <a:latin typeface="Montserrat"/>
         <a:ea typeface="Arial"/>
         <a:cs typeface="Arial"/>
         <a:sym typeface="Arial"/>
@@ -108,7 +108,7 @@
         <a:solidFill>
           <a:srgbClr val="000000"/>
         </a:solidFill>
-        <a:latin typeface="Arial"/>
+        <a:latin typeface="Montserrat"/>
         <a:ea typeface="Arial"/>
         <a:cs typeface="Arial"/>
         <a:sym typeface="Arial"/>
@@ -132,7 +132,7 @@
         <a:solidFill>
           <a:srgbClr val="000000"/>
         </a:solidFill>
-        <a:latin typeface="Arial"/>
+        <a:latin typeface="Montserrat"/>
         <a:ea typeface="Arial"/>
         <a:cs typeface="Arial"/>
         <a:sym typeface="Arial"/>
@@ -156,7 +156,7 @@
         <a:solidFill>
           <a:srgbClr val="000000"/>
         </a:solidFill>
-        <a:latin typeface="Arial"/>
+        <a:latin typeface="Montserrat"/>
         <a:ea typeface="Arial"/>
         <a:cs typeface="Arial"/>
         <a:sym typeface="Arial"/>
@@ -180,7 +180,7 @@
         <a:solidFill>
           <a:srgbClr val="000000"/>
         </a:solidFill>
-        <a:latin typeface="Arial"/>
+        <a:latin typeface="Montserrat"/>
         <a:ea typeface="Arial"/>
         <a:cs typeface="Arial"/>
         <a:sym typeface="Arial"/>
@@ -204,7 +204,7 @@
         <a:solidFill>
           <a:srgbClr val="000000"/>
         </a:solidFill>
-        <a:latin typeface="Arial"/>
+        <a:latin typeface="Montserrat"/>
         <a:ea typeface="Arial"/>
         <a:cs typeface="Arial"/>
         <a:sym typeface="Arial"/>
@@ -228,7 +228,7 @@
         <a:solidFill>
           <a:srgbClr val="000000"/>
         </a:solidFill>
-        <a:latin typeface="Arial"/>
+        <a:latin typeface="Montserrat"/>
         <a:ea typeface="Arial"/>
         <a:cs typeface="Arial"/>
         <a:sym typeface="Arial"/>
@@ -252,7 +252,7 @@
         <a:solidFill>
           <a:srgbClr val="000000"/>
         </a:solidFill>
-        <a:latin typeface="Arial"/>
+        <a:latin typeface="Montserrat"/>
         <a:ea typeface="Arial"/>
         <a:cs typeface="Arial"/>
         <a:sym typeface="Arial"/>
@@ -502,7 +502,7 @@
         <a:solidFill>
           <a:srgbClr val="000000"/>
         </a:solidFill>
-        <a:latin typeface="Arial"/>
+        <a:latin typeface="Montserrat"/>
         <a:ea typeface="Arial"/>
         <a:cs typeface="Arial"/>
         <a:sym typeface="Arial"/>
@@ -526,7 +526,7 @@
         <a:solidFill>
           <a:srgbClr val="000000"/>
         </a:solidFill>
-        <a:latin typeface="Arial"/>
+        <a:latin typeface="Montserrat"/>
         <a:ea typeface="Arial"/>
         <a:cs typeface="Arial"/>
         <a:sym typeface="Arial"/>
@@ -550,7 +550,7 @@
         <a:solidFill>
           <a:srgbClr val="000000"/>
         </a:solidFill>
-        <a:latin typeface="Arial"/>
+        <a:latin typeface="Montserrat"/>
         <a:ea typeface="Arial"/>
         <a:cs typeface="Arial"/>
         <a:sym typeface="Arial"/>
@@ -574,7 +574,7 @@
         <a:solidFill>
           <a:srgbClr val="000000"/>
         </a:solidFill>
-        <a:latin typeface="Arial"/>
+        <a:latin typeface="Montserrat"/>
         <a:ea typeface="Arial"/>
         <a:cs typeface="Arial"/>
         <a:sym typeface="Arial"/>
@@ -598,7 +598,7 @@
         <a:solidFill>
           <a:srgbClr val="000000"/>
         </a:solidFill>
-        <a:latin typeface="Arial"/>
+        <a:latin typeface="Montserrat"/>
         <a:ea typeface="Arial"/>
         <a:cs typeface="Arial"/>
         <a:sym typeface="Arial"/>
@@ -622,7 +622,7 @@
         <a:solidFill>
           <a:srgbClr val="000000"/>
         </a:solidFill>
-        <a:latin typeface="Arial"/>
+        <a:latin typeface="Montserrat"/>
         <a:ea typeface="Arial"/>
         <a:cs typeface="Arial"/>
         <a:sym typeface="Arial"/>
@@ -646,7 +646,7 @@
         <a:solidFill>
           <a:srgbClr val="000000"/>
         </a:solidFill>
-        <a:latin typeface="Arial"/>
+        <a:latin typeface="Montserrat"/>
         <a:ea typeface="Arial"/>
         <a:cs typeface="Arial"/>
         <a:sym typeface="Arial"/>
@@ -670,7 +670,7 @@
         <a:solidFill>
           <a:srgbClr val="000000"/>
         </a:solidFill>
-        <a:latin typeface="Arial"/>
+        <a:latin typeface="Montserrat"/>
         <a:ea typeface="Arial"/>
         <a:cs typeface="Arial"/>
         <a:sym typeface="Arial"/>
@@ -694,7 +694,7 @@
         <a:solidFill>
           <a:srgbClr val="000000"/>
         </a:solidFill>
-        <a:latin typeface="Arial"/>
+        <a:latin typeface="Montserrat"/>
         <a:ea typeface="Arial"/>
         <a:cs typeface="Arial"/>
         <a:sym typeface="Arial"/>
@@ -9664,7 +9664,7 @@
                 <a:solidFill>
                   <a:schemeClr val="dk1"/>
                 </a:solidFill>
-                <a:latin typeface="Calibri"/>
+                <a:latin typeface="Montserrat"/>
                 <a:ea typeface="Calibri"/>
                 <a:cs typeface="Calibri"/>
                 <a:sym typeface="Calibri"/>
@@ -9805,7 +9805,7 @@
                 <a:solidFill>
                   <a:schemeClr val="dk1"/>
                 </a:solidFill>
-                <a:latin typeface="Calibri"/>
+                <a:latin typeface="Montserrat"/>
                 <a:ea typeface="Calibri"/>
                 <a:cs typeface="Calibri"/>
                 <a:sym typeface="Calibri"/>
@@ -9828,7 +9828,7 @@
                 <a:solidFill>
                   <a:schemeClr val="dk1"/>
                 </a:solidFill>
-                <a:latin typeface="Calibri"/>
+                <a:latin typeface="Montserrat"/>
                 <a:ea typeface="Calibri"/>
                 <a:cs typeface="Calibri"/>
                 <a:sym typeface="Calibri"/>
@@ -9851,7 +9851,7 @@
                 <a:solidFill>
                   <a:schemeClr val="dk1"/>
                 </a:solidFill>
-                <a:latin typeface="Calibri"/>
+                <a:latin typeface="Montserrat"/>
                 <a:ea typeface="Calibri"/>
                 <a:cs typeface="Calibri"/>
                 <a:sym typeface="Calibri"/>
@@ -9874,7 +9874,7 @@
                 <a:solidFill>
                   <a:schemeClr val="dk1"/>
                 </a:solidFill>
-                <a:latin typeface="Calibri"/>
+                <a:latin typeface="Montserrat"/>
                 <a:ea typeface="Calibri"/>
                 <a:cs typeface="Calibri"/>
                 <a:sym typeface="Calibri"/>
@@ -9897,7 +9897,7 @@
                 <a:solidFill>
                   <a:schemeClr val="dk1"/>
                 </a:solidFill>
-                <a:latin typeface="Calibri"/>
+                <a:latin typeface="Montserrat"/>
                 <a:ea typeface="Calibri"/>
                 <a:cs typeface="Calibri"/>
                 <a:sym typeface="Calibri"/>
@@ -9920,7 +9920,7 @@
                 <a:solidFill>
                   <a:schemeClr val="dk1"/>
                 </a:solidFill>
-                <a:latin typeface="Calibri"/>
+                <a:latin typeface="Montserrat"/>
                 <a:ea typeface="Calibri"/>
                 <a:cs typeface="Calibri"/>
                 <a:sym typeface="Calibri"/>
@@ -9943,7 +9943,7 @@
                 <a:solidFill>
                   <a:schemeClr val="dk1"/>
                 </a:solidFill>
-                <a:latin typeface="Calibri"/>
+                <a:latin typeface="Montserrat"/>
                 <a:ea typeface="Calibri"/>
                 <a:cs typeface="Calibri"/>
                 <a:sym typeface="Calibri"/>
@@ -9966,7 +9966,7 @@
                 <a:solidFill>
                   <a:schemeClr val="dk1"/>
                 </a:solidFill>
-                <a:latin typeface="Calibri"/>
+                <a:latin typeface="Montserrat"/>
                 <a:ea typeface="Calibri"/>
                 <a:cs typeface="Calibri"/>
                 <a:sym typeface="Calibri"/>
@@ -9989,7 +9989,7 @@
                 <a:solidFill>
                   <a:schemeClr val="dk1"/>
                 </a:solidFill>
-                <a:latin typeface="Calibri"/>
+                <a:latin typeface="Montserrat"/>
                 <a:ea typeface="Calibri"/>
                 <a:cs typeface="Calibri"/>
                 <a:sym typeface="Calibri"/>
@@ -10038,7 +10038,7 @@
                 <a:solidFill>
                   <a:srgbClr val="888888"/>
                 </a:solidFill>
-                <a:latin typeface="Calibri"/>
+                <a:latin typeface="Montserrat"/>
                 <a:ea typeface="Calibri"/>
                 <a:cs typeface="Calibri"/>
                 <a:sym typeface="Calibri"/>
@@ -10057,7 +10057,7 @@
                 <a:solidFill>
                   <a:schemeClr val="dk1"/>
                 </a:solidFill>
-                <a:latin typeface="Calibri"/>
+                <a:latin typeface="Montserrat"/>
                 <a:ea typeface="Calibri"/>
                 <a:cs typeface="Calibri"/>
                 <a:sym typeface="Calibri"/>
@@ -10076,7 +10076,7 @@
                 <a:solidFill>
                   <a:schemeClr val="dk1"/>
                 </a:solidFill>
-                <a:latin typeface="Calibri"/>
+                <a:latin typeface="Montserrat"/>
                 <a:ea typeface="Calibri"/>
                 <a:cs typeface="Calibri"/>
                 <a:sym typeface="Calibri"/>
@@ -10095,7 +10095,7 @@
                 <a:solidFill>
                   <a:schemeClr val="dk1"/>
                 </a:solidFill>
-                <a:latin typeface="Calibri"/>
+                <a:latin typeface="Montserrat"/>
                 <a:ea typeface="Calibri"/>
                 <a:cs typeface="Calibri"/>
                 <a:sym typeface="Calibri"/>
@@ -10114,7 +10114,7 @@
                 <a:solidFill>
                   <a:schemeClr val="dk1"/>
                 </a:solidFill>
-                <a:latin typeface="Calibri"/>
+                <a:latin typeface="Montserrat"/>
                 <a:ea typeface="Calibri"/>
                 <a:cs typeface="Calibri"/>
                 <a:sym typeface="Calibri"/>
@@ -10133,7 +10133,7 @@
                 <a:solidFill>
                   <a:schemeClr val="dk1"/>
                 </a:solidFill>
-                <a:latin typeface="Calibri"/>
+                <a:latin typeface="Montserrat"/>
                 <a:ea typeface="Calibri"/>
                 <a:cs typeface="Calibri"/>
                 <a:sym typeface="Calibri"/>
@@ -10152,7 +10152,7 @@
                 <a:solidFill>
                   <a:schemeClr val="dk1"/>
                 </a:solidFill>
-                <a:latin typeface="Calibri"/>
+                <a:latin typeface="Montserrat"/>
                 <a:ea typeface="Calibri"/>
                 <a:cs typeface="Calibri"/>
                 <a:sym typeface="Calibri"/>
@@ -10171,7 +10171,7 @@
                 <a:solidFill>
                   <a:schemeClr val="dk1"/>
                 </a:solidFill>
-                <a:latin typeface="Calibri"/>
+                <a:latin typeface="Montserrat"/>
                 <a:ea typeface="Calibri"/>
                 <a:cs typeface="Calibri"/>
                 <a:sym typeface="Calibri"/>
@@ -10190,7 +10190,7 @@
                 <a:solidFill>
                   <a:schemeClr val="dk1"/>
                 </a:solidFill>
-                <a:latin typeface="Calibri"/>
+                <a:latin typeface="Montserrat"/>
                 <a:ea typeface="Calibri"/>
                 <a:cs typeface="Calibri"/>
                 <a:sym typeface="Calibri"/>
@@ -10239,7 +10239,7 @@
                 <a:solidFill>
                   <a:srgbClr val="888888"/>
                 </a:solidFill>
-                <a:latin typeface="Calibri"/>
+                <a:latin typeface="Montserrat"/>
                 <a:ea typeface="Calibri"/>
                 <a:cs typeface="Calibri"/>
                 <a:sym typeface="Calibri"/>
@@ -10258,7 +10258,7 @@
                 <a:solidFill>
                   <a:schemeClr val="dk1"/>
                 </a:solidFill>
-                <a:latin typeface="Calibri"/>
+                <a:latin typeface="Montserrat"/>
                 <a:ea typeface="Calibri"/>
                 <a:cs typeface="Calibri"/>
                 <a:sym typeface="Calibri"/>
@@ -10277,7 +10277,7 @@
                 <a:solidFill>
                   <a:schemeClr val="dk1"/>
                 </a:solidFill>
-                <a:latin typeface="Calibri"/>
+                <a:latin typeface="Montserrat"/>
                 <a:ea typeface="Calibri"/>
                 <a:cs typeface="Calibri"/>
                 <a:sym typeface="Calibri"/>
@@ -10296,7 +10296,7 @@
                 <a:solidFill>
                   <a:schemeClr val="dk1"/>
                 </a:solidFill>
-                <a:latin typeface="Calibri"/>
+                <a:latin typeface="Montserrat"/>
                 <a:ea typeface="Calibri"/>
                 <a:cs typeface="Calibri"/>
                 <a:sym typeface="Calibri"/>
@@ -10315,7 +10315,7 @@
                 <a:solidFill>
                   <a:schemeClr val="dk1"/>
                 </a:solidFill>
-                <a:latin typeface="Calibri"/>
+                <a:latin typeface="Montserrat"/>
                 <a:ea typeface="Calibri"/>
                 <a:cs typeface="Calibri"/>
                 <a:sym typeface="Calibri"/>
@@ -10334,7 +10334,7 @@
                 <a:solidFill>
                   <a:schemeClr val="dk1"/>
                 </a:solidFill>
-                <a:latin typeface="Calibri"/>
+                <a:latin typeface="Montserrat"/>
                 <a:ea typeface="Calibri"/>
                 <a:cs typeface="Calibri"/>
                 <a:sym typeface="Calibri"/>
@@ -10353,7 +10353,7 @@
                 <a:solidFill>
                   <a:schemeClr val="dk1"/>
                 </a:solidFill>
-                <a:latin typeface="Calibri"/>
+                <a:latin typeface="Montserrat"/>
                 <a:ea typeface="Calibri"/>
                 <a:cs typeface="Calibri"/>
                 <a:sym typeface="Calibri"/>
@@ -10372,7 +10372,7 @@
                 <a:solidFill>
                   <a:schemeClr val="dk1"/>
                 </a:solidFill>
-                <a:latin typeface="Calibri"/>
+                <a:latin typeface="Montserrat"/>
                 <a:ea typeface="Calibri"/>
                 <a:cs typeface="Calibri"/>
                 <a:sym typeface="Calibri"/>
@@ -10391,7 +10391,7 @@
                 <a:solidFill>
                   <a:schemeClr val="dk1"/>
                 </a:solidFill>
-                <a:latin typeface="Calibri"/>
+                <a:latin typeface="Montserrat"/>
                 <a:ea typeface="Calibri"/>
                 <a:cs typeface="Calibri"/>
                 <a:sym typeface="Calibri"/>
@@ -10436,7 +10436,7 @@
                 <a:solidFill>
                   <a:srgbClr val="888888"/>
                 </a:solidFill>
-                <a:latin typeface="Calibri"/>
+                <a:latin typeface="Montserrat"/>
                 <a:ea typeface="Calibri"/>
                 <a:cs typeface="Calibri"/>
                 <a:sym typeface="Calibri"/>
@@ -10451,7 +10451,7 @@
                 <a:solidFill>
                   <a:srgbClr val="888888"/>
                 </a:solidFill>
-                <a:latin typeface="Calibri"/>
+                <a:latin typeface="Montserrat"/>
                 <a:ea typeface="Calibri"/>
                 <a:cs typeface="Calibri"/>
                 <a:sym typeface="Calibri"/>
@@ -10466,7 +10466,7 @@
                 <a:solidFill>
                   <a:srgbClr val="888888"/>
                 </a:solidFill>
-                <a:latin typeface="Calibri"/>
+                <a:latin typeface="Montserrat"/>
                 <a:ea typeface="Calibri"/>
                 <a:cs typeface="Calibri"/>
                 <a:sym typeface="Calibri"/>
@@ -10481,7 +10481,7 @@
                 <a:solidFill>
                   <a:srgbClr val="888888"/>
                 </a:solidFill>
-                <a:latin typeface="Calibri"/>
+                <a:latin typeface="Montserrat"/>
                 <a:ea typeface="Calibri"/>
                 <a:cs typeface="Calibri"/>
                 <a:sym typeface="Calibri"/>
@@ -10496,7 +10496,7 @@
                 <a:solidFill>
                   <a:srgbClr val="888888"/>
                 </a:solidFill>
-                <a:latin typeface="Calibri"/>
+                <a:latin typeface="Montserrat"/>
                 <a:ea typeface="Calibri"/>
                 <a:cs typeface="Calibri"/>
                 <a:sym typeface="Calibri"/>
@@ -10511,7 +10511,7 @@
                 <a:solidFill>
                   <a:srgbClr val="888888"/>
                 </a:solidFill>
-                <a:latin typeface="Calibri"/>
+                <a:latin typeface="Montserrat"/>
                 <a:ea typeface="Calibri"/>
                 <a:cs typeface="Calibri"/>
                 <a:sym typeface="Calibri"/>
@@ -10526,7 +10526,7 @@
                 <a:solidFill>
                   <a:srgbClr val="888888"/>
                 </a:solidFill>
-                <a:latin typeface="Calibri"/>
+                <a:latin typeface="Montserrat"/>
                 <a:ea typeface="Calibri"/>
                 <a:cs typeface="Calibri"/>
                 <a:sym typeface="Calibri"/>
@@ -10541,7 +10541,7 @@
                 <a:solidFill>
                   <a:srgbClr val="888888"/>
                 </a:solidFill>
-                <a:latin typeface="Calibri"/>
+                <a:latin typeface="Montserrat"/>
                 <a:ea typeface="Calibri"/>
                 <a:cs typeface="Calibri"/>
                 <a:sym typeface="Calibri"/>
@@ -10556,7 +10556,7 @@
                 <a:solidFill>
                   <a:srgbClr val="888888"/>
                 </a:solidFill>
-                <a:latin typeface="Calibri"/>
+                <a:latin typeface="Montserrat"/>
                 <a:ea typeface="Calibri"/>
                 <a:cs typeface="Calibri"/>
                 <a:sym typeface="Calibri"/>
@@ -10629,7 +10629,7 @@
           <a:solidFill>
             <a:srgbClr val="000000"/>
           </a:solidFill>
-          <a:latin typeface="Arial"/>
+          <a:latin typeface="Montserrat"/>
           <a:ea typeface="Arial"/>
           <a:cs typeface="Arial"/>
           <a:sym typeface="Arial"/>
@@ -10653,7 +10653,7 @@
           <a:solidFill>
             <a:srgbClr val="000000"/>
           </a:solidFill>
-          <a:latin typeface="Arial"/>
+          <a:latin typeface="Montserrat"/>
           <a:ea typeface="Arial"/>
           <a:cs typeface="Arial"/>
           <a:sym typeface="Arial"/>
@@ -10677,7 +10677,7 @@
           <a:solidFill>
             <a:srgbClr val="000000"/>
           </a:solidFill>
-          <a:latin typeface="Arial"/>
+          <a:latin typeface="Montserrat"/>
           <a:ea typeface="Arial"/>
           <a:cs typeface="Arial"/>
           <a:sym typeface="Arial"/>
@@ -10701,7 +10701,7 @@
           <a:solidFill>
             <a:srgbClr val="000000"/>
           </a:solidFill>
-          <a:latin typeface="Arial"/>
+          <a:latin typeface="Montserrat"/>
           <a:ea typeface="Arial"/>
           <a:cs typeface="Arial"/>
           <a:sym typeface="Arial"/>
@@ -10725,7 +10725,7 @@
           <a:solidFill>
             <a:srgbClr val="000000"/>
           </a:solidFill>
-          <a:latin typeface="Arial"/>
+          <a:latin typeface="Montserrat"/>
           <a:ea typeface="Arial"/>
           <a:cs typeface="Arial"/>
           <a:sym typeface="Arial"/>
@@ -10749,7 +10749,7 @@
           <a:solidFill>
             <a:srgbClr val="000000"/>
           </a:solidFill>
-          <a:latin typeface="Arial"/>
+          <a:latin typeface="Montserrat"/>
           <a:ea typeface="Arial"/>
           <a:cs typeface="Arial"/>
           <a:sym typeface="Arial"/>
@@ -10773,7 +10773,7 @@
           <a:solidFill>
             <a:srgbClr val="000000"/>
           </a:solidFill>
-          <a:latin typeface="Arial"/>
+          <a:latin typeface="Montserrat"/>
           <a:ea typeface="Arial"/>
           <a:cs typeface="Arial"/>
           <a:sym typeface="Arial"/>
@@ -10797,7 +10797,7 @@
           <a:solidFill>
             <a:srgbClr val="000000"/>
           </a:solidFill>
-          <a:latin typeface="Arial"/>
+          <a:latin typeface="Montserrat"/>
           <a:ea typeface="Arial"/>
           <a:cs typeface="Arial"/>
           <a:sym typeface="Arial"/>
@@ -10821,7 +10821,7 @@
           <a:solidFill>
             <a:srgbClr val="000000"/>
           </a:solidFill>
-          <a:latin typeface="Arial"/>
+          <a:latin typeface="Montserrat"/>
           <a:ea typeface="Arial"/>
           <a:cs typeface="Arial"/>
           <a:sym typeface="Arial"/>
@@ -10858,7 +10858,7 @@
           <a:solidFill>
             <a:srgbClr val="000000"/>
           </a:solidFill>
-          <a:latin typeface="Arial"/>
+          <a:latin typeface="Montserrat"/>
           <a:ea typeface="Arial"/>
           <a:cs typeface="Arial"/>
           <a:sym typeface="Arial"/>
@@ -10882,7 +10882,7 @@
           <a:solidFill>
             <a:srgbClr val="000000"/>
           </a:solidFill>
-          <a:latin typeface="Arial"/>
+          <a:latin typeface="Montserrat"/>
           <a:ea typeface="Arial"/>
           <a:cs typeface="Arial"/>
           <a:sym typeface="Arial"/>
@@ -10906,7 +10906,7 @@
           <a:solidFill>
             <a:srgbClr val="000000"/>
           </a:solidFill>
-          <a:latin typeface="Arial"/>
+          <a:latin typeface="Montserrat"/>
           <a:ea typeface="Arial"/>
           <a:cs typeface="Arial"/>
           <a:sym typeface="Arial"/>
@@ -10930,7 +10930,7 @@
           <a:solidFill>
             <a:srgbClr val="000000"/>
           </a:solidFill>
-          <a:latin typeface="Arial"/>
+          <a:latin typeface="Montserrat"/>
           <a:ea typeface="Arial"/>
           <a:cs typeface="Arial"/>
           <a:sym typeface="Arial"/>
@@ -10954,7 +10954,7 @@
           <a:solidFill>
             <a:srgbClr val="000000"/>
           </a:solidFill>
-          <a:latin typeface="Arial"/>
+          <a:latin typeface="Montserrat"/>
           <a:ea typeface="Arial"/>
           <a:cs typeface="Arial"/>
           <a:sym typeface="Arial"/>
@@ -10978,7 +10978,7 @@
           <a:solidFill>
             <a:srgbClr val="000000"/>
           </a:solidFill>
-          <a:latin typeface="Arial"/>
+          <a:latin typeface="Montserrat"/>
           <a:ea typeface="Arial"/>
           <a:cs typeface="Arial"/>
           <a:sym typeface="Arial"/>
@@ -11002,7 +11002,7 @@
           <a:solidFill>
             <a:srgbClr val="000000"/>
           </a:solidFill>
-          <a:latin typeface="Arial"/>
+          <a:latin typeface="Montserrat"/>
           <a:ea typeface="Arial"/>
           <a:cs typeface="Arial"/>
           <a:sym typeface="Arial"/>
@@ -11026,7 +11026,7 @@
           <a:solidFill>
             <a:srgbClr val="000000"/>
           </a:solidFill>
-          <a:latin typeface="Arial"/>
+          <a:latin typeface="Montserrat"/>
           <a:ea typeface="Arial"/>
           <a:cs typeface="Arial"/>
           <a:sym typeface="Arial"/>
@@ -11050,7 +11050,7 @@
           <a:solidFill>
             <a:srgbClr val="000000"/>
           </a:solidFill>
-          <a:latin typeface="Arial"/>
+          <a:latin typeface="Montserrat"/>
           <a:ea typeface="Arial"/>
           <a:cs typeface="Arial"/>
           <a:sym typeface="Arial"/>
@@ -11087,7 +11087,7 @@
           <a:solidFill>
             <a:srgbClr val="000000"/>
           </a:solidFill>
-          <a:latin typeface="Arial"/>
+          <a:latin typeface="Montserrat"/>
           <a:ea typeface="Arial"/>
           <a:cs typeface="Arial"/>
           <a:sym typeface="Arial"/>
@@ -11111,7 +11111,7 @@
           <a:solidFill>
             <a:srgbClr val="000000"/>
           </a:solidFill>
-          <a:latin typeface="Arial"/>
+          <a:latin typeface="Montserrat"/>
           <a:ea typeface="Arial"/>
           <a:cs typeface="Arial"/>
           <a:sym typeface="Arial"/>
@@ -11135,7 +11135,7 @@
           <a:solidFill>
             <a:srgbClr val="000000"/>
           </a:solidFill>
-          <a:latin typeface="Arial"/>
+          <a:latin typeface="Montserrat"/>
           <a:ea typeface="Arial"/>
           <a:cs typeface="Arial"/>
           <a:sym typeface="Arial"/>
@@ -11159,7 +11159,7 @@
           <a:solidFill>
             <a:srgbClr val="000000"/>
           </a:solidFill>
-          <a:latin typeface="Arial"/>
+          <a:latin typeface="Montserrat"/>
           <a:ea typeface="Arial"/>
           <a:cs typeface="Arial"/>
           <a:sym typeface="Arial"/>
@@ -11183,7 +11183,7 @@
           <a:solidFill>
             <a:srgbClr val="000000"/>
           </a:solidFill>
-          <a:latin typeface="Arial"/>
+          <a:latin typeface="Montserrat"/>
           <a:ea typeface="Arial"/>
           <a:cs typeface="Arial"/>
           <a:sym typeface="Arial"/>
@@ -11207,7 +11207,7 @@
           <a:solidFill>
             <a:srgbClr val="000000"/>
           </a:solidFill>
-          <a:latin typeface="Arial"/>
+          <a:latin typeface="Montserrat"/>
           <a:ea typeface="Arial"/>
           <a:cs typeface="Arial"/>
           <a:sym typeface="Arial"/>
@@ -11231,7 +11231,7 @@
           <a:solidFill>
             <a:srgbClr val="000000"/>
           </a:solidFill>
-          <a:latin typeface="Arial"/>
+          <a:latin typeface="Montserrat"/>
           <a:ea typeface="Arial"/>
           <a:cs typeface="Arial"/>
           <a:sym typeface="Arial"/>
@@ -11255,7 +11255,7 @@
           <a:solidFill>
             <a:srgbClr val="000000"/>
           </a:solidFill>
-          <a:latin typeface="Arial"/>
+          <a:latin typeface="Montserrat"/>
           <a:ea typeface="Arial"/>
           <a:cs typeface="Arial"/>
           <a:sym typeface="Arial"/>
@@ -11279,7 +11279,7 @@
           <a:solidFill>
             <a:srgbClr val="000000"/>
           </a:solidFill>
-          <a:latin typeface="Arial"/>
+          <a:latin typeface="Montserrat"/>
           <a:ea typeface="Arial"/>
           <a:cs typeface="Arial"/>
           <a:sym typeface="Arial"/>
@@ -30297,7 +30297,7 @@
     </a:clrScheme>
     <a:fontScheme name="Office">
       <a:majorFont>
-        <a:latin typeface="Arial"/>
+        <a:latin typeface="Montserrat"/>
         <a:ea typeface=""/>
         <a:cs typeface=""/>
         <a:font script="Jpan" typeface="ＭＳ Ｐゴシック"/>
@@ -30332,7 +30332,7 @@
         <a:font script="Geor" typeface="Sylfaen"/>
       </a:majorFont>
       <a:minorFont>
-        <a:latin typeface="Arial"/>
+        <a:latin typeface="Montserrat"/>
         <a:ea typeface=""/>
         <a:cs typeface=""/>
         <a:font script="Jpan" typeface="ＭＳ Ｐゴシック"/>
@@ -30576,7 +30576,7 @@
     </a:clrScheme>
     <a:fontScheme name="Office">
       <a:majorFont>
-        <a:latin typeface="Arial"/>
+        <a:latin typeface="Montserrat"/>
         <a:ea typeface=""/>
         <a:cs typeface=""/>
         <a:font script="Jpan" typeface="ＭＳ Ｐゴシック"/>
@@ -30611,7 +30611,7 @@
         <a:font script="Geor" typeface="Sylfaen"/>
       </a:majorFont>
       <a:minorFont>
-        <a:latin typeface="Arial"/>
+        <a:latin typeface="Montserrat"/>
         <a:ea typeface=""/>
         <a:cs typeface=""/>
         <a:font script="Jpan" typeface="ＭＳ Ｐゴシック"/>
